--- a/make_presentation/templates/templates/flow/no_logo_3.pptx
+++ b/make_presentation/templates/templates/flow/no_logo_3.pptx
@@ -38,7 +38,7 @@
             <a:spLocks noGrp="1"/>
           </p:cNvSpPr>
           <p:nvPr>
-            <p:ph type="ftr" idx="2"/>
+            <p:ph type="ftr" idx="1"/>
           </p:nvPr>
         </p:nvSpPr>
         <p:spPr/>
@@ -58,14 +58,14 @@
             <a:spLocks noGrp="1"/>
           </p:cNvSpPr>
           <p:nvPr>
-            <p:ph type="sldNum" idx="3"/>
+            <p:ph type="sldNum" idx="2"/>
           </p:nvPr>
         </p:nvSpPr>
         <p:spPr/>
         <p:txBody>
           <a:bodyPr/>
           <a:p>
-            <a:fld id="{3E5C8A5E-8FA7-478D-B0F7-26A734E07B61}" type="slidenum">
+            <a:fld id="{0D530735-FD5E-4D37-99A4-9A5283EFA40D}" type="slidenum">
               <a:t>&lt;#&gt;</a:t>
             </a:fld>
           </a:p>
@@ -78,7 +78,7 @@
             <a:spLocks noGrp="1"/>
           </p:cNvSpPr>
           <p:nvPr>
-            <p:ph type="dt" idx="1"/>
+            <p:ph type="dt" idx="3"/>
           </p:nvPr>
         </p:nvSpPr>
         <p:spPr/>
@@ -86,7 +86,7 @@
           <a:bodyPr/>
           <a:p>
             <a:r>
-              <a:rPr lang="ru-RU"/>
+              <a:rPr lang="en-US"/>
               <a:t/>
             </a:r>
           </a:p>
@@ -127,7 +127,7 @@
         <p:spPr>
           <a:xfrm>
             <a:off x="1143000" y="841680"/>
-            <a:ext cx="6857640" cy="1790280"/>
+            <a:ext cx="6857280" cy="1789920"/>
           </a:xfrm>
           <a:prstGeom prst="rect">
             <a:avLst/>
@@ -142,11 +142,11 @@
             <a:noAutofit/>
           </a:bodyPr>
           <a:p>
-            <a:endParaRPr b="0" lang="en-US" sz="1800" spc="-1" strike="noStrike">
-              <a:solidFill>
-                <a:srgbClr val="000000"/>
-              </a:solidFill>
-              <a:latin typeface="Calibri"/>
+            <a:pPr algn="ctr">
+              <a:buNone/>
+            </a:pPr>
+            <a:endParaRPr b="0" lang="en-US" sz="4400" spc="-1" strike="noStrike">
+              <a:latin typeface="Arial"/>
             </a:endParaRPr>
           </a:p>
         </p:txBody>
@@ -179,20 +179,8 @@
             <a:normAutofit/>
           </a:bodyPr>
           <a:p>
-            <a:pPr>
-              <a:lnSpc>
-                <a:spcPct val="90000"/>
-              </a:lnSpc>
-              <a:spcBef>
-                <a:spcPts val="1417"/>
-              </a:spcBef>
-              <a:buNone/>
-            </a:pPr>
-            <a:endParaRPr b="0" lang="en-US" sz="2100" spc="-1" strike="noStrike">
-              <a:solidFill>
-                <a:srgbClr val="000000"/>
-              </a:solidFill>
-              <a:latin typeface="Calibri"/>
+            <a:endParaRPr b="0" lang="en-US" sz="3200" spc="-1" strike="noStrike">
+              <a:latin typeface="Arial"/>
             </a:endParaRPr>
           </a:p>
         </p:txBody>
@@ -225,20 +213,8 @@
             <a:normAutofit/>
           </a:bodyPr>
           <a:p>
-            <a:pPr>
-              <a:lnSpc>
-                <a:spcPct val="90000"/>
-              </a:lnSpc>
-              <a:spcBef>
-                <a:spcPts val="1417"/>
-              </a:spcBef>
-              <a:buNone/>
-            </a:pPr>
-            <a:endParaRPr b="0" lang="en-US" sz="2100" spc="-1" strike="noStrike">
-              <a:solidFill>
-                <a:srgbClr val="000000"/>
-              </a:solidFill>
-              <a:latin typeface="Calibri"/>
+            <a:endParaRPr b="0" lang="en-US" sz="3200" spc="-1" strike="noStrike">
+              <a:latin typeface="Arial"/>
             </a:endParaRPr>
           </a:p>
         </p:txBody>
@@ -250,7 +226,7 @@
             <a:spLocks noGrp="1"/>
           </p:cNvSpPr>
           <p:nvPr>
-            <p:ph type="ftr" idx="2"/>
+            <p:ph type="ftr" idx="1"/>
           </p:nvPr>
         </p:nvSpPr>
         <p:spPr/>
@@ -270,14 +246,14 @@
             <a:spLocks noGrp="1"/>
           </p:cNvSpPr>
           <p:nvPr>
-            <p:ph type="sldNum" idx="3"/>
+            <p:ph type="sldNum" idx="2"/>
           </p:nvPr>
         </p:nvSpPr>
         <p:spPr/>
         <p:txBody>
           <a:bodyPr/>
           <a:p>
-            <a:fld id="{30A5935F-4E92-4413-9F1F-59F0263C3EC0}" type="slidenum">
+            <a:fld id="{32DD589B-B22C-41B8-9B03-E8E46602F54A}" type="slidenum">
               <a:t>&lt;#&gt;</a:t>
             </a:fld>
           </a:p>
@@ -290,7 +266,7 @@
             <a:spLocks noGrp="1"/>
           </p:cNvSpPr>
           <p:nvPr>
-            <p:ph type="dt" idx="1"/>
+            <p:ph type="dt" idx="3"/>
           </p:nvPr>
         </p:nvSpPr>
         <p:spPr/>
@@ -298,7 +274,7 @@
           <a:bodyPr/>
           <a:p>
             <a:r>
-              <a:rPr lang="ru-RU"/>
+              <a:rPr lang="en-US"/>
               <a:t/>
             </a:r>
           </a:p>
@@ -339,7 +315,7 @@
         <p:spPr>
           <a:xfrm>
             <a:off x="1143000" y="841680"/>
-            <a:ext cx="6857640" cy="1790280"/>
+            <a:ext cx="6857280" cy="1789920"/>
           </a:xfrm>
           <a:prstGeom prst="rect">
             <a:avLst/>
@@ -354,11 +330,11 @@
             <a:noAutofit/>
           </a:bodyPr>
           <a:p>
-            <a:endParaRPr b="0" lang="en-US" sz="1800" spc="-1" strike="noStrike">
-              <a:solidFill>
-                <a:srgbClr val="000000"/>
-              </a:solidFill>
-              <a:latin typeface="Calibri"/>
+            <a:pPr algn="ctr">
+              <a:buNone/>
+            </a:pPr>
+            <a:endParaRPr b="0" lang="en-US" sz="4400" spc="-1" strike="noStrike">
+              <a:latin typeface="Arial"/>
             </a:endParaRPr>
           </a:p>
         </p:txBody>
@@ -391,20 +367,8 @@
             <a:normAutofit/>
           </a:bodyPr>
           <a:p>
-            <a:pPr>
-              <a:lnSpc>
-                <a:spcPct val="90000"/>
-              </a:lnSpc>
-              <a:spcBef>
-                <a:spcPts val="1417"/>
-              </a:spcBef>
-              <a:buNone/>
-            </a:pPr>
-            <a:endParaRPr b="0" lang="en-US" sz="2100" spc="-1" strike="noStrike">
-              <a:solidFill>
-                <a:srgbClr val="000000"/>
-              </a:solidFill>
-              <a:latin typeface="Calibri"/>
+            <a:endParaRPr b="0" lang="en-US" sz="3200" spc="-1" strike="noStrike">
+              <a:latin typeface="Arial"/>
             </a:endParaRPr>
           </a:p>
         </p:txBody>
@@ -437,20 +401,8 @@
             <a:normAutofit/>
           </a:bodyPr>
           <a:p>
-            <a:pPr>
-              <a:lnSpc>
-                <a:spcPct val="90000"/>
-              </a:lnSpc>
-              <a:spcBef>
-                <a:spcPts val="1417"/>
-              </a:spcBef>
-              <a:buNone/>
-            </a:pPr>
-            <a:endParaRPr b="0" lang="en-US" sz="2100" spc="-1" strike="noStrike">
-              <a:solidFill>
-                <a:srgbClr val="000000"/>
-              </a:solidFill>
-              <a:latin typeface="Calibri"/>
+            <a:endParaRPr b="0" lang="en-US" sz="3200" spc="-1" strike="noStrike">
+              <a:latin typeface="Arial"/>
             </a:endParaRPr>
           </a:p>
         </p:txBody>
@@ -483,20 +435,8 @@
             <a:normAutofit/>
           </a:bodyPr>
           <a:p>
-            <a:pPr>
-              <a:lnSpc>
-                <a:spcPct val="90000"/>
-              </a:lnSpc>
-              <a:spcBef>
-                <a:spcPts val="1417"/>
-              </a:spcBef>
-              <a:buNone/>
-            </a:pPr>
-            <a:endParaRPr b="0" lang="en-US" sz="2100" spc="-1" strike="noStrike">
-              <a:solidFill>
-                <a:srgbClr val="000000"/>
-              </a:solidFill>
-              <a:latin typeface="Calibri"/>
+            <a:endParaRPr b="0" lang="en-US" sz="3200" spc="-1" strike="noStrike">
+              <a:latin typeface="Arial"/>
             </a:endParaRPr>
           </a:p>
         </p:txBody>
@@ -529,20 +469,8 @@
             <a:normAutofit/>
           </a:bodyPr>
           <a:p>
-            <a:pPr>
-              <a:lnSpc>
-                <a:spcPct val="90000"/>
-              </a:lnSpc>
-              <a:spcBef>
-                <a:spcPts val="1417"/>
-              </a:spcBef>
-              <a:buNone/>
-            </a:pPr>
-            <a:endParaRPr b="0" lang="en-US" sz="2100" spc="-1" strike="noStrike">
-              <a:solidFill>
-                <a:srgbClr val="000000"/>
-              </a:solidFill>
-              <a:latin typeface="Calibri"/>
+            <a:endParaRPr b="0" lang="en-US" sz="3200" spc="-1" strike="noStrike">
+              <a:latin typeface="Arial"/>
             </a:endParaRPr>
           </a:p>
         </p:txBody>
@@ -554,7 +482,7 @@
             <a:spLocks noGrp="1"/>
           </p:cNvSpPr>
           <p:nvPr>
-            <p:ph type="ftr" idx="2"/>
+            <p:ph type="ftr" idx="1"/>
           </p:nvPr>
         </p:nvSpPr>
         <p:spPr/>
@@ -574,14 +502,14 @@
             <a:spLocks noGrp="1"/>
           </p:cNvSpPr>
           <p:nvPr>
-            <p:ph type="sldNum" idx="3"/>
+            <p:ph type="sldNum" idx="2"/>
           </p:nvPr>
         </p:nvSpPr>
         <p:spPr/>
         <p:txBody>
           <a:bodyPr/>
           <a:p>
-            <a:fld id="{F6CB5853-4B12-4585-97C7-21C3E1F84D52}" type="slidenum">
+            <a:fld id="{07E20EBC-3854-48D8-997B-00A8F3ABB783}" type="slidenum">
               <a:t>&lt;#&gt;</a:t>
             </a:fld>
           </a:p>
@@ -594,7 +522,7 @@
             <a:spLocks noGrp="1"/>
           </p:cNvSpPr>
           <p:nvPr>
-            <p:ph type="dt" idx="1"/>
+            <p:ph type="dt" idx="3"/>
           </p:nvPr>
         </p:nvSpPr>
         <p:spPr/>
@@ -602,7 +530,7 @@
           <a:bodyPr/>
           <a:p>
             <a:r>
-              <a:rPr lang="ru-RU"/>
+              <a:rPr lang="en-US"/>
               <a:t/>
             </a:r>
           </a:p>
@@ -643,7 +571,7 @@
         <p:spPr>
           <a:xfrm>
             <a:off x="1143000" y="841680"/>
-            <a:ext cx="6857640" cy="1790280"/>
+            <a:ext cx="6857280" cy="1789920"/>
           </a:xfrm>
           <a:prstGeom prst="rect">
             <a:avLst/>
@@ -658,11 +586,11 @@
             <a:noAutofit/>
           </a:bodyPr>
           <a:p>
-            <a:endParaRPr b="0" lang="en-US" sz="1800" spc="-1" strike="noStrike">
-              <a:solidFill>
-                <a:srgbClr val="000000"/>
-              </a:solidFill>
-              <a:latin typeface="Calibri"/>
+            <a:pPr algn="ctr">
+              <a:buNone/>
+            </a:pPr>
+            <a:endParaRPr b="0" lang="en-US" sz="4400" spc="-1" strike="noStrike">
+              <a:latin typeface="Arial"/>
             </a:endParaRPr>
           </a:p>
         </p:txBody>
@@ -695,20 +623,8 @@
             <a:normAutofit/>
           </a:bodyPr>
           <a:p>
-            <a:pPr>
-              <a:lnSpc>
-                <a:spcPct val="90000"/>
-              </a:lnSpc>
-              <a:spcBef>
-                <a:spcPts val="1417"/>
-              </a:spcBef>
-              <a:buNone/>
-            </a:pPr>
-            <a:endParaRPr b="0" lang="en-US" sz="2100" spc="-1" strike="noStrike">
-              <a:solidFill>
-                <a:srgbClr val="000000"/>
-              </a:solidFill>
-              <a:latin typeface="Calibri"/>
+            <a:endParaRPr b="0" lang="en-US" sz="3200" spc="-1" strike="noStrike">
+              <a:latin typeface="Arial"/>
             </a:endParaRPr>
           </a:p>
         </p:txBody>
@@ -741,20 +657,8 @@
             <a:normAutofit/>
           </a:bodyPr>
           <a:p>
-            <a:pPr>
-              <a:lnSpc>
-                <a:spcPct val="90000"/>
-              </a:lnSpc>
-              <a:spcBef>
-                <a:spcPts val="1417"/>
-              </a:spcBef>
-              <a:buNone/>
-            </a:pPr>
-            <a:endParaRPr b="0" lang="en-US" sz="2100" spc="-1" strike="noStrike">
-              <a:solidFill>
-                <a:srgbClr val="000000"/>
-              </a:solidFill>
-              <a:latin typeface="Calibri"/>
+            <a:endParaRPr b="0" lang="en-US" sz="3200" spc="-1" strike="noStrike">
+              <a:latin typeface="Arial"/>
             </a:endParaRPr>
           </a:p>
         </p:txBody>
@@ -787,20 +691,8 @@
             <a:normAutofit/>
           </a:bodyPr>
           <a:p>
-            <a:pPr>
-              <a:lnSpc>
-                <a:spcPct val="90000"/>
-              </a:lnSpc>
-              <a:spcBef>
-                <a:spcPts val="1417"/>
-              </a:spcBef>
-              <a:buNone/>
-            </a:pPr>
-            <a:endParaRPr b="0" lang="en-US" sz="2100" spc="-1" strike="noStrike">
-              <a:solidFill>
-                <a:srgbClr val="000000"/>
-              </a:solidFill>
-              <a:latin typeface="Calibri"/>
+            <a:endParaRPr b="0" lang="en-US" sz="3200" spc="-1" strike="noStrike">
+              <a:latin typeface="Arial"/>
             </a:endParaRPr>
           </a:p>
         </p:txBody>
@@ -833,20 +725,8 @@
             <a:normAutofit/>
           </a:bodyPr>
           <a:p>
-            <a:pPr>
-              <a:lnSpc>
-                <a:spcPct val="90000"/>
-              </a:lnSpc>
-              <a:spcBef>
-                <a:spcPts val="1417"/>
-              </a:spcBef>
-              <a:buNone/>
-            </a:pPr>
-            <a:endParaRPr b="0" lang="en-US" sz="2100" spc="-1" strike="noStrike">
-              <a:solidFill>
-                <a:srgbClr val="000000"/>
-              </a:solidFill>
-              <a:latin typeface="Calibri"/>
+            <a:endParaRPr b="0" lang="en-US" sz="3200" spc="-1" strike="noStrike">
+              <a:latin typeface="Arial"/>
             </a:endParaRPr>
           </a:p>
         </p:txBody>
@@ -879,20 +759,8 @@
             <a:normAutofit/>
           </a:bodyPr>
           <a:p>
-            <a:pPr>
-              <a:lnSpc>
-                <a:spcPct val="90000"/>
-              </a:lnSpc>
-              <a:spcBef>
-                <a:spcPts val="1417"/>
-              </a:spcBef>
-              <a:buNone/>
-            </a:pPr>
-            <a:endParaRPr b="0" lang="en-US" sz="2100" spc="-1" strike="noStrike">
-              <a:solidFill>
-                <a:srgbClr val="000000"/>
-              </a:solidFill>
-              <a:latin typeface="Calibri"/>
+            <a:endParaRPr b="0" lang="en-US" sz="3200" spc="-1" strike="noStrike">
+              <a:latin typeface="Arial"/>
             </a:endParaRPr>
           </a:p>
         </p:txBody>
@@ -925,20 +793,8 @@
             <a:normAutofit/>
           </a:bodyPr>
           <a:p>
-            <a:pPr>
-              <a:lnSpc>
-                <a:spcPct val="90000"/>
-              </a:lnSpc>
-              <a:spcBef>
-                <a:spcPts val="1417"/>
-              </a:spcBef>
-              <a:buNone/>
-            </a:pPr>
-            <a:endParaRPr b="0" lang="en-US" sz="2100" spc="-1" strike="noStrike">
-              <a:solidFill>
-                <a:srgbClr val="000000"/>
-              </a:solidFill>
-              <a:latin typeface="Calibri"/>
+            <a:endParaRPr b="0" lang="en-US" sz="3200" spc="-1" strike="noStrike">
+              <a:latin typeface="Arial"/>
             </a:endParaRPr>
           </a:p>
         </p:txBody>
@@ -950,7 +806,7 @@
             <a:spLocks noGrp="1"/>
           </p:cNvSpPr>
           <p:nvPr>
-            <p:ph type="ftr" idx="2"/>
+            <p:ph type="ftr" idx="1"/>
           </p:nvPr>
         </p:nvSpPr>
         <p:spPr/>
@@ -970,14 +826,14 @@
             <a:spLocks noGrp="1"/>
           </p:cNvSpPr>
           <p:nvPr>
-            <p:ph type="sldNum" idx="3"/>
+            <p:ph type="sldNum" idx="2"/>
           </p:nvPr>
         </p:nvSpPr>
         <p:spPr/>
         <p:txBody>
           <a:bodyPr/>
           <a:p>
-            <a:fld id="{DF4890B9-0A2A-4971-814E-7997A3E18F5B}" type="slidenum">
+            <a:fld id="{E96DF92D-FC71-46EE-91A7-843DBA5DEC94}" type="slidenum">
               <a:t>&lt;#&gt;</a:t>
             </a:fld>
           </a:p>
@@ -990,7 +846,7 @@
             <a:spLocks noGrp="1"/>
           </p:cNvSpPr>
           <p:nvPr>
-            <p:ph type="dt" idx="1"/>
+            <p:ph type="dt" idx="3"/>
           </p:nvPr>
         </p:nvSpPr>
         <p:spPr/>
@@ -998,7 +854,7 @@
           <a:bodyPr/>
           <a:p>
             <a:r>
-              <a:rPr lang="ru-RU"/>
+              <a:rPr lang="en-US"/>
               <a:t/>
             </a:r>
           </a:p>
@@ -1039,44 +895,7 @@
         <p:spPr>
           <a:xfrm>
             <a:off x="1143000" y="841680"/>
-            <a:ext cx="6857640" cy="1790280"/>
-          </a:xfrm>
-          <a:prstGeom prst="rect">
-            <a:avLst/>
-          </a:prstGeom>
-          <a:noFill/>
-          <a:ln w="0">
-            <a:noFill/>
-          </a:ln>
-        </p:spPr>
-        <p:txBody>
-          <a:bodyPr lIns="0" rIns="0" tIns="0" bIns="0" anchor="ctr">
-            <a:noAutofit/>
-          </a:bodyPr>
-          <a:p>
-            <a:endParaRPr b="0" lang="en-US" sz="1800" spc="-1" strike="noStrike">
-              <a:solidFill>
-                <a:srgbClr val="000000"/>
-              </a:solidFill>
-              <a:latin typeface="Calibri"/>
-            </a:endParaRPr>
-          </a:p>
-        </p:txBody>
-      </p:sp>
-      <p:sp>
-        <p:nvSpPr>
-          <p:cNvPr id="6" name="PlaceHolder 2"/>
-          <p:cNvSpPr>
-            <a:spLocks noGrp="1"/>
-          </p:cNvSpPr>
-          <p:nvPr>
-            <p:ph type="subTitle"/>
-          </p:nvPr>
-        </p:nvSpPr>
-        <p:spPr>
-          <a:xfrm>
-            <a:off x="457200" y="1203480"/>
-            <a:ext cx="8229240" cy="2982960"/>
+            <a:ext cx="6857280" cy="1789920"/>
           </a:xfrm>
           <a:prstGeom prst="rect">
             <a:avLst/>
@@ -1094,7 +913,44 @@
             <a:pPr algn="ctr">
               <a:buNone/>
             </a:pPr>
-            <a:endParaRPr b="0" lang="ru-RU" sz="3200" spc="-1" strike="noStrike">
+            <a:endParaRPr b="0" lang="en-US" sz="4400" spc="-1" strike="noStrike">
+              <a:latin typeface="Arial"/>
+            </a:endParaRPr>
+          </a:p>
+        </p:txBody>
+      </p:sp>
+      <p:sp>
+        <p:nvSpPr>
+          <p:cNvPr id="6" name="PlaceHolder 2"/>
+          <p:cNvSpPr>
+            <a:spLocks noGrp="1"/>
+          </p:cNvSpPr>
+          <p:nvPr>
+            <p:ph type="subTitle"/>
+          </p:nvPr>
+        </p:nvSpPr>
+        <p:spPr>
+          <a:xfrm>
+            <a:off x="457200" y="1203480"/>
+            <a:ext cx="8229240" cy="2982960"/>
+          </a:xfrm>
+          <a:prstGeom prst="rect">
+            <a:avLst/>
+          </a:prstGeom>
+          <a:noFill/>
+          <a:ln w="0">
+            <a:noFill/>
+          </a:ln>
+        </p:spPr>
+        <p:txBody>
+          <a:bodyPr lIns="0" rIns="0" tIns="0" bIns="0" anchor="ctr">
+            <a:noAutofit/>
+          </a:bodyPr>
+          <a:p>
+            <a:pPr algn="ctr">
+              <a:buNone/>
+            </a:pPr>
+            <a:endParaRPr b="0" lang="en-US" sz="3200" spc="-1" strike="noStrike">
               <a:latin typeface="Arial"/>
             </a:endParaRPr>
           </a:p>
@@ -1107,7 +963,7 @@
             <a:spLocks noGrp="1"/>
           </p:cNvSpPr>
           <p:nvPr>
-            <p:ph type="ftr" idx="2"/>
+            <p:ph type="ftr" idx="1"/>
           </p:nvPr>
         </p:nvSpPr>
         <p:spPr/>
@@ -1127,14 +983,14 @@
             <a:spLocks noGrp="1"/>
           </p:cNvSpPr>
           <p:nvPr>
-            <p:ph type="sldNum" idx="3"/>
+            <p:ph type="sldNum" idx="2"/>
           </p:nvPr>
         </p:nvSpPr>
         <p:spPr/>
         <p:txBody>
           <a:bodyPr/>
           <a:p>
-            <a:fld id="{21484215-CD86-40C7-84DD-0050252E6BD1}" type="slidenum">
+            <a:fld id="{212221DE-245D-4F79-949E-85A76475CC5C}" type="slidenum">
               <a:t>&lt;#&gt;</a:t>
             </a:fld>
           </a:p>
@@ -1147,7 +1003,7 @@
             <a:spLocks noGrp="1"/>
           </p:cNvSpPr>
           <p:nvPr>
-            <p:ph type="dt" idx="1"/>
+            <p:ph type="dt" idx="3"/>
           </p:nvPr>
         </p:nvSpPr>
         <p:spPr/>
@@ -1155,7 +1011,7 @@
           <a:bodyPr/>
           <a:p>
             <a:r>
-              <a:rPr lang="ru-RU"/>
+              <a:rPr lang="en-US"/>
               <a:t/>
             </a:r>
           </a:p>
@@ -1196,7 +1052,7 @@
         <p:spPr>
           <a:xfrm>
             <a:off x="1143000" y="841680"/>
-            <a:ext cx="6857640" cy="1790280"/>
+            <a:ext cx="6857280" cy="1789920"/>
           </a:xfrm>
           <a:prstGeom prst="rect">
             <a:avLst/>
@@ -1211,11 +1067,11 @@
             <a:noAutofit/>
           </a:bodyPr>
           <a:p>
-            <a:endParaRPr b="0" lang="en-US" sz="1800" spc="-1" strike="noStrike">
-              <a:solidFill>
-                <a:srgbClr val="000000"/>
-              </a:solidFill>
-              <a:latin typeface="Calibri"/>
+            <a:pPr algn="ctr">
+              <a:buNone/>
+            </a:pPr>
+            <a:endParaRPr b="0" lang="en-US" sz="4400" spc="-1" strike="noStrike">
+              <a:latin typeface="Arial"/>
             </a:endParaRPr>
           </a:p>
         </p:txBody>
@@ -1248,20 +1104,8 @@
             <a:normAutofit/>
           </a:bodyPr>
           <a:p>
-            <a:pPr>
-              <a:lnSpc>
-                <a:spcPct val="90000"/>
-              </a:lnSpc>
-              <a:spcBef>
-                <a:spcPts val="1417"/>
-              </a:spcBef>
-              <a:buNone/>
-            </a:pPr>
-            <a:endParaRPr b="0" lang="en-US" sz="2100" spc="-1" strike="noStrike">
-              <a:solidFill>
-                <a:srgbClr val="000000"/>
-              </a:solidFill>
-              <a:latin typeface="Calibri"/>
+            <a:endParaRPr b="0" lang="en-US" sz="3200" spc="-1" strike="noStrike">
+              <a:latin typeface="Arial"/>
             </a:endParaRPr>
           </a:p>
         </p:txBody>
@@ -1273,7 +1117,7 @@
             <a:spLocks noGrp="1"/>
           </p:cNvSpPr>
           <p:nvPr>
-            <p:ph type="ftr" idx="2"/>
+            <p:ph type="ftr" idx="1"/>
           </p:nvPr>
         </p:nvSpPr>
         <p:spPr/>
@@ -1293,14 +1137,14 @@
             <a:spLocks noGrp="1"/>
           </p:cNvSpPr>
           <p:nvPr>
-            <p:ph type="sldNum" idx="3"/>
+            <p:ph type="sldNum" idx="2"/>
           </p:nvPr>
         </p:nvSpPr>
         <p:spPr/>
         <p:txBody>
           <a:bodyPr/>
           <a:p>
-            <a:fld id="{3C36E7CA-E6C1-4852-B1A7-AF895C1172DD}" type="slidenum">
+            <a:fld id="{5F7D556E-61A4-41F0-A168-0E4EFC3AD9AC}" type="slidenum">
               <a:t>&lt;#&gt;</a:t>
             </a:fld>
           </a:p>
@@ -1313,7 +1157,7 @@
             <a:spLocks noGrp="1"/>
           </p:cNvSpPr>
           <p:nvPr>
-            <p:ph type="dt" idx="1"/>
+            <p:ph type="dt" idx="3"/>
           </p:nvPr>
         </p:nvSpPr>
         <p:spPr/>
@@ -1321,7 +1165,7 @@
           <a:bodyPr/>
           <a:p>
             <a:r>
-              <a:rPr lang="ru-RU"/>
+              <a:rPr lang="en-US"/>
               <a:t/>
             </a:r>
           </a:p>
@@ -1362,7 +1206,7 @@
         <p:spPr>
           <a:xfrm>
             <a:off x="1143000" y="841680"/>
-            <a:ext cx="6857640" cy="1790280"/>
+            <a:ext cx="6857280" cy="1789920"/>
           </a:xfrm>
           <a:prstGeom prst="rect">
             <a:avLst/>
@@ -1377,11 +1221,11 @@
             <a:noAutofit/>
           </a:bodyPr>
           <a:p>
-            <a:endParaRPr b="0" lang="en-US" sz="1800" spc="-1" strike="noStrike">
-              <a:solidFill>
-                <a:srgbClr val="000000"/>
-              </a:solidFill>
-              <a:latin typeface="Calibri"/>
+            <a:pPr algn="ctr">
+              <a:buNone/>
+            </a:pPr>
+            <a:endParaRPr b="0" lang="en-US" sz="4400" spc="-1" strike="noStrike">
+              <a:latin typeface="Arial"/>
             </a:endParaRPr>
           </a:p>
         </p:txBody>
@@ -1414,20 +1258,8 @@
             <a:normAutofit/>
           </a:bodyPr>
           <a:p>
-            <a:pPr>
-              <a:lnSpc>
-                <a:spcPct val="90000"/>
-              </a:lnSpc>
-              <a:spcBef>
-                <a:spcPts val="1417"/>
-              </a:spcBef>
-              <a:buNone/>
-            </a:pPr>
-            <a:endParaRPr b="0" lang="en-US" sz="2100" spc="-1" strike="noStrike">
-              <a:solidFill>
-                <a:srgbClr val="000000"/>
-              </a:solidFill>
-              <a:latin typeface="Calibri"/>
+            <a:endParaRPr b="0" lang="en-US" sz="3200" spc="-1" strike="noStrike">
+              <a:latin typeface="Arial"/>
             </a:endParaRPr>
           </a:p>
         </p:txBody>
@@ -1460,20 +1292,8 @@
             <a:normAutofit/>
           </a:bodyPr>
           <a:p>
-            <a:pPr>
-              <a:lnSpc>
-                <a:spcPct val="90000"/>
-              </a:lnSpc>
-              <a:spcBef>
-                <a:spcPts val="1417"/>
-              </a:spcBef>
-              <a:buNone/>
-            </a:pPr>
-            <a:endParaRPr b="0" lang="en-US" sz="2100" spc="-1" strike="noStrike">
-              <a:solidFill>
-                <a:srgbClr val="000000"/>
-              </a:solidFill>
-              <a:latin typeface="Calibri"/>
+            <a:endParaRPr b="0" lang="en-US" sz="3200" spc="-1" strike="noStrike">
+              <a:latin typeface="Arial"/>
             </a:endParaRPr>
           </a:p>
         </p:txBody>
@@ -1485,7 +1305,7 @@
             <a:spLocks noGrp="1"/>
           </p:cNvSpPr>
           <p:nvPr>
-            <p:ph type="ftr" idx="2"/>
+            <p:ph type="ftr" idx="1"/>
           </p:nvPr>
         </p:nvSpPr>
         <p:spPr/>
@@ -1505,14 +1325,14 @@
             <a:spLocks noGrp="1"/>
           </p:cNvSpPr>
           <p:nvPr>
-            <p:ph type="sldNum" idx="3"/>
+            <p:ph type="sldNum" idx="2"/>
           </p:nvPr>
         </p:nvSpPr>
         <p:spPr/>
         <p:txBody>
           <a:bodyPr/>
           <a:p>
-            <a:fld id="{A20C81C4-8046-4926-9E14-7CC33EE1FDE1}" type="slidenum">
+            <a:fld id="{A3D7113D-3075-498A-AA68-CAF6E028CEC3}" type="slidenum">
               <a:t>&lt;#&gt;</a:t>
             </a:fld>
           </a:p>
@@ -1525,7 +1345,7 @@
             <a:spLocks noGrp="1"/>
           </p:cNvSpPr>
           <p:nvPr>
-            <p:ph type="dt" idx="1"/>
+            <p:ph type="dt" idx="3"/>
           </p:nvPr>
         </p:nvSpPr>
         <p:spPr/>
@@ -1533,7 +1353,7 @@
           <a:bodyPr/>
           <a:p>
             <a:r>
-              <a:rPr lang="ru-RU"/>
+              <a:rPr lang="en-US"/>
               <a:t/>
             </a:r>
           </a:p>
@@ -1574,7 +1394,7 @@
         <p:spPr>
           <a:xfrm>
             <a:off x="1143000" y="841680"/>
-            <a:ext cx="6857640" cy="1790280"/>
+            <a:ext cx="6857280" cy="1789920"/>
           </a:xfrm>
           <a:prstGeom prst="rect">
             <a:avLst/>
@@ -1589,11 +1409,11 @@
             <a:noAutofit/>
           </a:bodyPr>
           <a:p>
-            <a:endParaRPr b="0" lang="en-US" sz="1800" spc="-1" strike="noStrike">
-              <a:solidFill>
-                <a:srgbClr val="000000"/>
-              </a:solidFill>
-              <a:latin typeface="Calibri"/>
+            <a:pPr algn="ctr">
+              <a:buNone/>
+            </a:pPr>
+            <a:endParaRPr b="0" lang="en-US" sz="4400" spc="-1" strike="noStrike">
+              <a:latin typeface="Arial"/>
             </a:endParaRPr>
           </a:p>
         </p:txBody>
@@ -1605,7 +1425,7 @@
             <a:spLocks noGrp="1"/>
           </p:cNvSpPr>
           <p:nvPr>
-            <p:ph type="ftr" idx="2"/>
+            <p:ph type="ftr" idx="1"/>
           </p:nvPr>
         </p:nvSpPr>
         <p:spPr/>
@@ -1625,14 +1445,14 @@
             <a:spLocks noGrp="1"/>
           </p:cNvSpPr>
           <p:nvPr>
-            <p:ph type="sldNum" idx="3"/>
+            <p:ph type="sldNum" idx="2"/>
           </p:nvPr>
         </p:nvSpPr>
         <p:spPr/>
         <p:txBody>
           <a:bodyPr/>
           <a:p>
-            <a:fld id="{6B4E3971-5D5E-4762-B690-D835E6404539}" type="slidenum">
+            <a:fld id="{A918762B-9181-48B8-866B-A631099F60A4}" type="slidenum">
               <a:t>&lt;#&gt;</a:t>
             </a:fld>
           </a:p>
@@ -1645,7 +1465,7 @@
             <a:spLocks noGrp="1"/>
           </p:cNvSpPr>
           <p:nvPr>
-            <p:ph type="dt" idx="1"/>
+            <p:ph type="dt" idx="3"/>
           </p:nvPr>
         </p:nvSpPr>
         <p:spPr/>
@@ -1653,7 +1473,7 @@
           <a:bodyPr/>
           <a:p>
             <a:r>
-              <a:rPr lang="ru-RU"/>
+              <a:rPr lang="en-US"/>
               <a:t/>
             </a:r>
           </a:p>
@@ -1694,7 +1514,7 @@
         <p:spPr>
           <a:xfrm>
             <a:off x="1143000" y="841680"/>
-            <a:ext cx="6857640" cy="8299800"/>
+            <a:ext cx="6857280" cy="8298360"/>
           </a:xfrm>
           <a:prstGeom prst="rect">
             <a:avLst/>
@@ -1712,7 +1532,7 @@
             <a:pPr algn="ctr">
               <a:buNone/>
             </a:pPr>
-            <a:endParaRPr b="0" lang="ru-RU" sz="3200" spc="-1" strike="noStrike">
+            <a:endParaRPr b="0" lang="en-US" sz="3200" spc="-1" strike="noStrike">
               <a:latin typeface="Arial"/>
             </a:endParaRPr>
           </a:p>
@@ -1725,7 +1545,7 @@
             <a:spLocks noGrp="1"/>
           </p:cNvSpPr>
           <p:nvPr>
-            <p:ph type="ftr" idx="2"/>
+            <p:ph type="ftr" idx="1"/>
           </p:nvPr>
         </p:nvSpPr>
         <p:spPr/>
@@ -1745,14 +1565,14 @@
             <a:spLocks noGrp="1"/>
           </p:cNvSpPr>
           <p:nvPr>
-            <p:ph type="sldNum" idx="3"/>
+            <p:ph type="sldNum" idx="2"/>
           </p:nvPr>
         </p:nvSpPr>
         <p:spPr/>
         <p:txBody>
           <a:bodyPr/>
           <a:p>
-            <a:fld id="{A3CF7F3C-2A22-4ADE-A687-4BEAC9525D1A}" type="slidenum">
+            <a:fld id="{910003E8-39ED-48E3-9FD4-FB64552F3954}" type="slidenum">
               <a:t>&lt;#&gt;</a:t>
             </a:fld>
           </a:p>
@@ -1765,7 +1585,7 @@
             <a:spLocks noGrp="1"/>
           </p:cNvSpPr>
           <p:nvPr>
-            <p:ph type="dt" idx="1"/>
+            <p:ph type="dt" idx="3"/>
           </p:nvPr>
         </p:nvSpPr>
         <p:spPr/>
@@ -1773,7 +1593,7 @@
           <a:bodyPr/>
           <a:p>
             <a:r>
-              <a:rPr lang="ru-RU"/>
+              <a:rPr lang="en-US"/>
               <a:t/>
             </a:r>
           </a:p>
@@ -1814,7 +1634,7 @@
         <p:spPr>
           <a:xfrm>
             <a:off x="1143000" y="841680"/>
-            <a:ext cx="6857640" cy="1790280"/>
+            <a:ext cx="6857280" cy="1789920"/>
           </a:xfrm>
           <a:prstGeom prst="rect">
             <a:avLst/>
@@ -1829,11 +1649,11 @@
             <a:noAutofit/>
           </a:bodyPr>
           <a:p>
-            <a:endParaRPr b="0" lang="en-US" sz="1800" spc="-1" strike="noStrike">
-              <a:solidFill>
-                <a:srgbClr val="000000"/>
-              </a:solidFill>
-              <a:latin typeface="Calibri"/>
+            <a:pPr algn="ctr">
+              <a:buNone/>
+            </a:pPr>
+            <a:endParaRPr b="0" lang="en-US" sz="4400" spc="-1" strike="noStrike">
+              <a:latin typeface="Arial"/>
             </a:endParaRPr>
           </a:p>
         </p:txBody>
@@ -1866,20 +1686,8 @@
             <a:normAutofit/>
           </a:bodyPr>
           <a:p>
-            <a:pPr>
-              <a:lnSpc>
-                <a:spcPct val="90000"/>
-              </a:lnSpc>
-              <a:spcBef>
-                <a:spcPts val="1417"/>
-              </a:spcBef>
-              <a:buNone/>
-            </a:pPr>
-            <a:endParaRPr b="0" lang="en-US" sz="2100" spc="-1" strike="noStrike">
-              <a:solidFill>
-                <a:srgbClr val="000000"/>
-              </a:solidFill>
-              <a:latin typeface="Calibri"/>
+            <a:endParaRPr b="0" lang="en-US" sz="3200" spc="-1" strike="noStrike">
+              <a:latin typeface="Arial"/>
             </a:endParaRPr>
           </a:p>
         </p:txBody>
@@ -1912,20 +1720,8 @@
             <a:normAutofit/>
           </a:bodyPr>
           <a:p>
-            <a:pPr>
-              <a:lnSpc>
-                <a:spcPct val="90000"/>
-              </a:lnSpc>
-              <a:spcBef>
-                <a:spcPts val="1417"/>
-              </a:spcBef>
-              <a:buNone/>
-            </a:pPr>
-            <a:endParaRPr b="0" lang="en-US" sz="2100" spc="-1" strike="noStrike">
-              <a:solidFill>
-                <a:srgbClr val="000000"/>
-              </a:solidFill>
-              <a:latin typeface="Calibri"/>
+            <a:endParaRPr b="0" lang="en-US" sz="3200" spc="-1" strike="noStrike">
+              <a:latin typeface="Arial"/>
             </a:endParaRPr>
           </a:p>
         </p:txBody>
@@ -1958,20 +1754,8 @@
             <a:normAutofit/>
           </a:bodyPr>
           <a:p>
-            <a:pPr>
-              <a:lnSpc>
-                <a:spcPct val="90000"/>
-              </a:lnSpc>
-              <a:spcBef>
-                <a:spcPts val="1417"/>
-              </a:spcBef>
-              <a:buNone/>
-            </a:pPr>
-            <a:endParaRPr b="0" lang="en-US" sz="2100" spc="-1" strike="noStrike">
-              <a:solidFill>
-                <a:srgbClr val="000000"/>
-              </a:solidFill>
-              <a:latin typeface="Calibri"/>
+            <a:endParaRPr b="0" lang="en-US" sz="3200" spc="-1" strike="noStrike">
+              <a:latin typeface="Arial"/>
             </a:endParaRPr>
           </a:p>
         </p:txBody>
@@ -1983,7 +1767,7 @@
             <a:spLocks noGrp="1"/>
           </p:cNvSpPr>
           <p:nvPr>
-            <p:ph type="ftr" idx="2"/>
+            <p:ph type="ftr" idx="1"/>
           </p:nvPr>
         </p:nvSpPr>
         <p:spPr/>
@@ -2003,14 +1787,14 @@
             <a:spLocks noGrp="1"/>
           </p:cNvSpPr>
           <p:nvPr>
-            <p:ph type="sldNum" idx="3"/>
+            <p:ph type="sldNum" idx="2"/>
           </p:nvPr>
         </p:nvSpPr>
         <p:spPr/>
         <p:txBody>
           <a:bodyPr/>
           <a:p>
-            <a:fld id="{30AD762C-2CA9-4754-93A2-E7FE909BEDDB}" type="slidenum">
+            <a:fld id="{488D7A57-83FC-47FE-A4D2-E394568C90E2}" type="slidenum">
               <a:t>&lt;#&gt;</a:t>
             </a:fld>
           </a:p>
@@ -2023,7 +1807,7 @@
             <a:spLocks noGrp="1"/>
           </p:cNvSpPr>
           <p:nvPr>
-            <p:ph type="dt" idx="1"/>
+            <p:ph type="dt" idx="3"/>
           </p:nvPr>
         </p:nvSpPr>
         <p:spPr/>
@@ -2031,7 +1815,7 @@
           <a:bodyPr/>
           <a:p>
             <a:r>
-              <a:rPr lang="ru-RU"/>
+              <a:rPr lang="en-US"/>
               <a:t/>
             </a:r>
           </a:p>
@@ -2072,7 +1856,7 @@
         <p:spPr>
           <a:xfrm>
             <a:off x="1143000" y="841680"/>
-            <a:ext cx="6857640" cy="1790280"/>
+            <a:ext cx="6857280" cy="1789920"/>
           </a:xfrm>
           <a:prstGeom prst="rect">
             <a:avLst/>
@@ -2087,11 +1871,11 @@
             <a:noAutofit/>
           </a:bodyPr>
           <a:p>
-            <a:endParaRPr b="0" lang="en-US" sz="1800" spc="-1" strike="noStrike">
-              <a:solidFill>
-                <a:srgbClr val="000000"/>
-              </a:solidFill>
-              <a:latin typeface="Calibri"/>
+            <a:pPr algn="ctr">
+              <a:buNone/>
+            </a:pPr>
+            <a:endParaRPr b="0" lang="en-US" sz="4400" spc="-1" strike="noStrike">
+              <a:latin typeface="Arial"/>
             </a:endParaRPr>
           </a:p>
         </p:txBody>
@@ -2124,20 +1908,8 @@
             <a:normAutofit/>
           </a:bodyPr>
           <a:p>
-            <a:pPr>
-              <a:lnSpc>
-                <a:spcPct val="90000"/>
-              </a:lnSpc>
-              <a:spcBef>
-                <a:spcPts val="1417"/>
-              </a:spcBef>
-              <a:buNone/>
-            </a:pPr>
-            <a:endParaRPr b="0" lang="en-US" sz="2100" spc="-1" strike="noStrike">
-              <a:solidFill>
-                <a:srgbClr val="000000"/>
-              </a:solidFill>
-              <a:latin typeface="Calibri"/>
+            <a:endParaRPr b="0" lang="en-US" sz="3200" spc="-1" strike="noStrike">
+              <a:latin typeface="Arial"/>
             </a:endParaRPr>
           </a:p>
         </p:txBody>
@@ -2170,20 +1942,8 @@
             <a:normAutofit/>
           </a:bodyPr>
           <a:p>
-            <a:pPr>
-              <a:lnSpc>
-                <a:spcPct val="90000"/>
-              </a:lnSpc>
-              <a:spcBef>
-                <a:spcPts val="1417"/>
-              </a:spcBef>
-              <a:buNone/>
-            </a:pPr>
-            <a:endParaRPr b="0" lang="en-US" sz="2100" spc="-1" strike="noStrike">
-              <a:solidFill>
-                <a:srgbClr val="000000"/>
-              </a:solidFill>
-              <a:latin typeface="Calibri"/>
+            <a:endParaRPr b="0" lang="en-US" sz="3200" spc="-1" strike="noStrike">
+              <a:latin typeface="Arial"/>
             </a:endParaRPr>
           </a:p>
         </p:txBody>
@@ -2216,20 +1976,8 @@
             <a:normAutofit/>
           </a:bodyPr>
           <a:p>
-            <a:pPr>
-              <a:lnSpc>
-                <a:spcPct val="90000"/>
-              </a:lnSpc>
-              <a:spcBef>
-                <a:spcPts val="1417"/>
-              </a:spcBef>
-              <a:buNone/>
-            </a:pPr>
-            <a:endParaRPr b="0" lang="en-US" sz="2100" spc="-1" strike="noStrike">
-              <a:solidFill>
-                <a:srgbClr val="000000"/>
-              </a:solidFill>
-              <a:latin typeface="Calibri"/>
+            <a:endParaRPr b="0" lang="en-US" sz="3200" spc="-1" strike="noStrike">
+              <a:latin typeface="Arial"/>
             </a:endParaRPr>
           </a:p>
         </p:txBody>
@@ -2241,7 +1989,7 @@
             <a:spLocks noGrp="1"/>
           </p:cNvSpPr>
           <p:nvPr>
-            <p:ph type="ftr" idx="2"/>
+            <p:ph type="ftr" idx="1"/>
           </p:nvPr>
         </p:nvSpPr>
         <p:spPr/>
@@ -2261,14 +2009,14 @@
             <a:spLocks noGrp="1"/>
           </p:cNvSpPr>
           <p:nvPr>
-            <p:ph type="sldNum" idx="3"/>
+            <p:ph type="sldNum" idx="2"/>
           </p:nvPr>
         </p:nvSpPr>
         <p:spPr/>
         <p:txBody>
           <a:bodyPr/>
           <a:p>
-            <a:fld id="{ECB456F4-4A62-4928-8E2F-8B51C3B2A8E9}" type="slidenum">
+            <a:fld id="{DFDC6976-3438-425F-A762-A6C2B46E8E8A}" type="slidenum">
               <a:t>&lt;#&gt;</a:t>
             </a:fld>
           </a:p>
@@ -2281,7 +2029,7 @@
             <a:spLocks noGrp="1"/>
           </p:cNvSpPr>
           <p:nvPr>
-            <p:ph type="dt" idx="1"/>
+            <p:ph type="dt" idx="3"/>
           </p:nvPr>
         </p:nvSpPr>
         <p:spPr/>
@@ -2289,7 +2037,7 @@
           <a:bodyPr/>
           <a:p>
             <a:r>
-              <a:rPr lang="ru-RU"/>
+              <a:rPr lang="en-US"/>
               <a:t/>
             </a:r>
           </a:p>
@@ -2330,7 +2078,7 @@
         <p:spPr>
           <a:xfrm>
             <a:off x="1143000" y="841680"/>
-            <a:ext cx="6857640" cy="1790280"/>
+            <a:ext cx="6857280" cy="1789920"/>
           </a:xfrm>
           <a:prstGeom prst="rect">
             <a:avLst/>
@@ -2345,11 +2093,11 @@
             <a:noAutofit/>
           </a:bodyPr>
           <a:p>
-            <a:endParaRPr b="0" lang="en-US" sz="1800" spc="-1" strike="noStrike">
-              <a:solidFill>
-                <a:srgbClr val="000000"/>
-              </a:solidFill>
-              <a:latin typeface="Calibri"/>
+            <a:pPr algn="ctr">
+              <a:buNone/>
+            </a:pPr>
+            <a:endParaRPr b="0" lang="en-US" sz="4400" spc="-1" strike="noStrike">
+              <a:latin typeface="Arial"/>
             </a:endParaRPr>
           </a:p>
         </p:txBody>
@@ -2382,20 +2130,8 @@
             <a:normAutofit/>
           </a:bodyPr>
           <a:p>
-            <a:pPr>
-              <a:lnSpc>
-                <a:spcPct val="90000"/>
-              </a:lnSpc>
-              <a:spcBef>
-                <a:spcPts val="1417"/>
-              </a:spcBef>
-              <a:buNone/>
-            </a:pPr>
-            <a:endParaRPr b="0" lang="en-US" sz="2100" spc="-1" strike="noStrike">
-              <a:solidFill>
-                <a:srgbClr val="000000"/>
-              </a:solidFill>
-              <a:latin typeface="Calibri"/>
+            <a:endParaRPr b="0" lang="en-US" sz="3200" spc="-1" strike="noStrike">
+              <a:latin typeface="Arial"/>
             </a:endParaRPr>
           </a:p>
         </p:txBody>
@@ -2428,20 +2164,8 @@
             <a:normAutofit/>
           </a:bodyPr>
           <a:p>
-            <a:pPr>
-              <a:lnSpc>
-                <a:spcPct val="90000"/>
-              </a:lnSpc>
-              <a:spcBef>
-                <a:spcPts val="1417"/>
-              </a:spcBef>
-              <a:buNone/>
-            </a:pPr>
-            <a:endParaRPr b="0" lang="en-US" sz="2100" spc="-1" strike="noStrike">
-              <a:solidFill>
-                <a:srgbClr val="000000"/>
-              </a:solidFill>
-              <a:latin typeface="Calibri"/>
+            <a:endParaRPr b="0" lang="en-US" sz="3200" spc="-1" strike="noStrike">
+              <a:latin typeface="Arial"/>
             </a:endParaRPr>
           </a:p>
         </p:txBody>
@@ -2474,20 +2198,8 @@
             <a:normAutofit/>
           </a:bodyPr>
           <a:p>
-            <a:pPr>
-              <a:lnSpc>
-                <a:spcPct val="90000"/>
-              </a:lnSpc>
-              <a:spcBef>
-                <a:spcPts val="1417"/>
-              </a:spcBef>
-              <a:buNone/>
-            </a:pPr>
-            <a:endParaRPr b="0" lang="en-US" sz="2100" spc="-1" strike="noStrike">
-              <a:solidFill>
-                <a:srgbClr val="000000"/>
-              </a:solidFill>
-              <a:latin typeface="Calibri"/>
+            <a:endParaRPr b="0" lang="en-US" sz="3200" spc="-1" strike="noStrike">
+              <a:latin typeface="Arial"/>
             </a:endParaRPr>
           </a:p>
         </p:txBody>
@@ -2499,7 +2211,7 @@
             <a:spLocks noGrp="1"/>
           </p:cNvSpPr>
           <p:nvPr>
-            <p:ph type="ftr" idx="2"/>
+            <p:ph type="ftr" idx="1"/>
           </p:nvPr>
         </p:nvSpPr>
         <p:spPr/>
@@ -2519,14 +2231,14 @@
             <a:spLocks noGrp="1"/>
           </p:cNvSpPr>
           <p:nvPr>
-            <p:ph type="sldNum" idx="3"/>
+            <p:ph type="sldNum" idx="2"/>
           </p:nvPr>
         </p:nvSpPr>
         <p:spPr/>
         <p:txBody>
           <a:bodyPr/>
           <a:p>
-            <a:fld id="{7F30C878-325F-4ABF-9123-71BD73EDFCEE}" type="slidenum">
+            <a:fld id="{9BA7838A-D1E8-4710-94D9-DF4891E11C95}" type="slidenum">
               <a:t>&lt;#&gt;</a:t>
             </a:fld>
           </a:p>
@@ -2539,7 +2251,7 @@
             <a:spLocks noGrp="1"/>
           </p:cNvSpPr>
           <p:nvPr>
-            <p:ph type="dt" idx="1"/>
+            <p:ph type="dt" idx="3"/>
           </p:nvPr>
         </p:nvSpPr>
         <p:spPr/>
@@ -2547,7 +2259,7 @@
           <a:bodyPr/>
           <a:p>
             <a:r>
-              <a:rPr lang="ru-RU"/>
+              <a:rPr lang="en-US"/>
               <a:t/>
             </a:r>
           </a:p>
@@ -2595,41 +2307,29 @@
         <p:spPr>
           <a:xfrm>
             <a:off x="1143000" y="841680"/>
-            <a:ext cx="6857640" cy="1790280"/>
-          </a:xfrm>
-          <a:prstGeom prst="rect">
-            <a:avLst/>
-          </a:prstGeom>
-          <a:noFill/>
-          <a:ln w="0">
-            <a:noFill/>
-          </a:ln>
-        </p:spPr>
-        <p:txBody>
-          <a:bodyPr anchor="b">
+            <a:ext cx="6857280" cy="1789920"/>
+          </a:xfrm>
+          <a:prstGeom prst="rect">
+            <a:avLst/>
+          </a:prstGeom>
+          <a:noFill/>
+          <a:ln w="0">
+            <a:noFill/>
+          </a:ln>
+        </p:spPr>
+        <p:txBody>
+          <a:bodyPr lIns="0" rIns="0" tIns="0" bIns="0" anchor="ctr">
             <a:noAutofit/>
           </a:bodyPr>
           <a:p>
-            <a:pPr algn="ctr">
-              <a:lnSpc>
-                <a:spcPct val="90000"/>
-              </a:lnSpc>
-              <a:buNone/>
-            </a:pPr>
-            <a:r>
-              <a:rPr b="0" lang="ru-RU" sz="4500" spc="-1" strike="noStrike">
-                <a:solidFill>
-                  <a:srgbClr val="000000"/>
-                </a:solidFill>
-                <a:latin typeface="Calibri Light"/>
+            <a:r>
+              <a:rPr b="0" lang="en-US" sz="1800" spc="-1" strike="noStrike">
+                <a:latin typeface="Arial"/>
               </a:rPr>
-              <a:t>Образец заголовка</a:t>
-            </a:r>
-            <a:endParaRPr b="0" lang="en-US" sz="4500" spc="-1" strike="noStrike">
-              <a:solidFill>
-                <a:srgbClr val="000000"/>
-              </a:solidFill>
-              <a:latin typeface="Calibri"/>
+              <a:t>Click to edit the title text format</a:t>
+            </a:r>
+            <a:endParaRPr b="0" lang="en-US" sz="1800" spc="-1" strike="noStrike">
+              <a:latin typeface="Arial"/>
             </a:endParaRPr>
           </a:p>
         </p:txBody>
@@ -2641,91 +2341,31 @@
             <a:spLocks noGrp="1"/>
           </p:cNvSpPr>
           <p:nvPr>
-            <p:ph type="dt" idx="1"/>
-          </p:nvPr>
-        </p:nvSpPr>
-        <p:spPr>
-          <a:xfrm>
-            <a:off x="628560" y="4767120"/>
-            <a:ext cx="2057040" cy="273600"/>
-          </a:xfrm>
-          <a:prstGeom prst="rect">
-            <a:avLst/>
-          </a:prstGeom>
-          <a:noFill/>
-          <a:ln w="0">
-            <a:noFill/>
-          </a:ln>
-        </p:spPr>
-        <p:txBody>
-          <a:bodyPr anchor="ctr">
+            <p:ph type="ftr" idx="1"/>
+          </p:nvPr>
+        </p:nvSpPr>
+        <p:spPr>
+          <a:xfrm>
+            <a:off x="3029040" y="4767120"/>
+            <a:ext cx="3085560" cy="273240"/>
+          </a:xfrm>
+          <a:prstGeom prst="rect">
+            <a:avLst/>
+          </a:prstGeom>
+          <a:noFill/>
+          <a:ln w="0">
+            <a:noFill/>
+          </a:ln>
+        </p:spPr>
+        <p:txBody>
+          <a:bodyPr lIns="90000" rIns="90000" tIns="45000" bIns="45000" anchor="ctr">
             <a:noAutofit/>
           </a:bodyPr>
           <a:lstStyle>
-            <a:lvl1pPr>
+            <a:lvl1pPr algn="ctr">
               <a:lnSpc>
                 <a:spcPct val="100000"/>
               </a:lnSpc>
-              <a:buNone/>
-              <a:defRPr b="0" lang="en-US" sz="900" spc="-1" strike="noStrike">
-                <a:solidFill>
-                  <a:srgbClr val="8b8b8b"/>
-                </a:solidFill>
-                <a:latin typeface="Calibri"/>
-              </a:defRPr>
-            </a:lvl1pPr>
-          </a:lstStyle>
-          <a:p>
-            <a:pPr>
-              <a:lnSpc>
-                <a:spcPct val="100000"/>
-              </a:lnSpc>
-              <a:buNone/>
-            </a:pPr>
-            <a:r>
-              <a:rPr b="0" lang="en-US" sz="900" spc="-1" strike="noStrike">
-                <a:solidFill>
-                  <a:srgbClr val="8b8b8b"/>
-                </a:solidFill>
-                <a:latin typeface="Calibri"/>
-              </a:rPr>
-              <a:t>&lt;дата/время&gt;</a:t>
-            </a:r>
-            <a:endParaRPr b="0" lang="ru-RU" sz="900" spc="-1" strike="noStrike">
-              <a:latin typeface="Times New Roman"/>
-            </a:endParaRPr>
-          </a:p>
-        </p:txBody>
-      </p:sp>
-      <p:sp>
-        <p:nvSpPr>
-          <p:cNvPr id="2" name="PlaceHolder 3"/>
-          <p:cNvSpPr>
-            <a:spLocks noGrp="1"/>
-          </p:cNvSpPr>
-          <p:nvPr>
-            <p:ph type="ftr" idx="2"/>
-          </p:nvPr>
-        </p:nvSpPr>
-        <p:spPr>
-          <a:xfrm>
-            <a:off x="3029040" y="4767120"/>
-            <a:ext cx="3085920" cy="273600"/>
-          </a:xfrm>
-          <a:prstGeom prst="rect">
-            <a:avLst/>
-          </a:prstGeom>
-          <a:noFill/>
-          <a:ln w="0">
-            <a:noFill/>
-          </a:ln>
-        </p:spPr>
-        <p:txBody>
-          <a:bodyPr anchor="ctr">
-            <a:noAutofit/>
-          </a:bodyPr>
-          <a:lstStyle>
-            <a:lvl1pPr algn="ctr">
               <a:buNone/>
               <a:defRPr b="0" lang="ru-RU" sz="1400" spc="-1" strike="noStrike">
                 <a:latin typeface="Times New Roman"/>
@@ -2734,15 +2374,18 @@
           </a:lstStyle>
           <a:p>
             <a:pPr algn="ctr">
+              <a:lnSpc>
+                <a:spcPct val="100000"/>
+              </a:lnSpc>
               <a:buNone/>
             </a:pPr>
             <a:r>
               <a:rPr b="0" lang="ru-RU" sz="1400" spc="-1" strike="noStrike">
                 <a:latin typeface="Times New Roman"/>
               </a:rPr>
-              <a:t>&lt;нижний колонтитул&gt;</a:t>
-            </a:r>
-            <a:endParaRPr b="0" lang="ru-RU" sz="1400" spc="-1" strike="noStrike">
+              <a:t>&lt;footer&gt;</a:t>
+            </a:r>
+            <a:endParaRPr b="0" lang="en-US" sz="1400" spc="-1" strike="noStrike">
               <a:latin typeface="Times New Roman"/>
             </a:endParaRPr>
           </a:p>
@@ -2750,29 +2393,29 @@
       </p:sp>
       <p:sp>
         <p:nvSpPr>
-          <p:cNvPr id="3" name="PlaceHolder 4"/>
-          <p:cNvSpPr>
-            <a:spLocks noGrp="1"/>
-          </p:cNvSpPr>
-          <p:nvPr>
-            <p:ph type="sldNum" idx="3"/>
+          <p:cNvPr id="2" name="PlaceHolder 3"/>
+          <p:cNvSpPr>
+            <a:spLocks noGrp="1"/>
+          </p:cNvSpPr>
+          <p:nvPr>
+            <p:ph type="sldNum" idx="2"/>
           </p:nvPr>
         </p:nvSpPr>
         <p:spPr>
           <a:xfrm>
             <a:off x="6458040" y="4767120"/>
-            <a:ext cx="2057040" cy="273600"/>
-          </a:xfrm>
-          <a:prstGeom prst="rect">
-            <a:avLst/>
-          </a:prstGeom>
-          <a:noFill/>
-          <a:ln w="0">
-            <a:noFill/>
-          </a:ln>
-        </p:spPr>
-        <p:txBody>
-          <a:bodyPr anchor="ctr">
+            <a:ext cx="2056680" cy="273240"/>
+          </a:xfrm>
+          <a:prstGeom prst="rect">
+            <a:avLst/>
+          </a:prstGeom>
+          <a:noFill/>
+          <a:ln w="0">
+            <a:noFill/>
+          </a:ln>
+        </p:spPr>
+        <p:txBody>
+          <a:bodyPr lIns="90000" rIns="90000" tIns="45000" bIns="45000" anchor="ctr">
             <a:noAutofit/>
           </a:bodyPr>
           <a:lstStyle>
@@ -2796,16 +2439,63 @@
               </a:lnSpc>
               <a:buNone/>
             </a:pPr>
-            <a:fld id="{41AB45ED-5E5C-49B0-A282-202598CACFEF}" type="slidenum">
+            <a:fld id="{BFCDF62F-EFC6-4C09-B247-C1FED5B43EBA}" type="slidenum">
               <a:rPr b="0" lang="en-US" sz="900" spc="-1" strike="noStrike">
                 <a:solidFill>
                   <a:srgbClr val="8b8b8b"/>
                 </a:solidFill>
                 <a:latin typeface="Calibri"/>
               </a:rPr>
-              <a:t>&lt;номер&gt;</a:t>
+              <a:t>&lt;number&gt;</a:t>
             </a:fld>
-            <a:endParaRPr b="0" lang="ru-RU" sz="900" spc="-1" strike="noStrike">
+            <a:endParaRPr b="0" lang="en-US" sz="900" spc="-1" strike="noStrike">
+              <a:latin typeface="Times New Roman"/>
+            </a:endParaRPr>
+          </a:p>
+        </p:txBody>
+      </p:sp>
+      <p:sp>
+        <p:nvSpPr>
+          <p:cNvPr id="3" name="PlaceHolder 4"/>
+          <p:cNvSpPr>
+            <a:spLocks noGrp="1"/>
+          </p:cNvSpPr>
+          <p:nvPr>
+            <p:ph type="dt" idx="3"/>
+          </p:nvPr>
+        </p:nvSpPr>
+        <p:spPr>
+          <a:xfrm>
+            <a:off x="628560" y="4767120"/>
+            <a:ext cx="2056680" cy="273240"/>
+          </a:xfrm>
+          <a:prstGeom prst="rect">
+            <a:avLst/>
+          </a:prstGeom>
+          <a:noFill/>
+          <a:ln w="0">
+            <a:noFill/>
+          </a:ln>
+        </p:spPr>
+        <p:txBody>
+          <a:bodyPr lIns="90000" rIns="90000" tIns="45000" bIns="45000" anchor="ctr">
+            <a:noAutofit/>
+          </a:bodyPr>
+          <a:lstStyle>
+            <a:lvl1pPr>
+              <a:defRPr b="0" lang="en-US" sz="1400" spc="-1" strike="noStrike">
+                <a:latin typeface="Times New Roman"/>
+              </a:defRPr>
+            </a:lvl1pPr>
+          </a:lstStyle>
+          <a:p>
+            <a:r>
+              <a:rPr b="0" lang="en-US" sz="1400" spc="-1" strike="noStrike">
+                <a:latin typeface="Times New Roman"/>
+              </a:rPr>
+              <a:t>&lt;date/time&gt;</a:t>
+            </a:r>
+            <a:endParaRPr b="0" lang="en-US" sz="1400" spc="-1" strike="noStrike">
               <a:latin typeface="Times New Roman"/>
             </a:endParaRPr>
           </a:p>
@@ -2840,9 +2530,6 @@
           </a:bodyPr>
           <a:p>
             <a:pPr marL="432000" indent="-324000">
-              <a:lnSpc>
-                <a:spcPct val="90000"/>
-              </a:lnSpc>
               <a:spcBef>
                 <a:spcPts val="1417"/>
               </a:spcBef>
@@ -2854,26 +2541,17 @@
               <a:buChar char=""/>
             </a:pPr>
             <a:r>
-              <a:rPr b="0" lang="en-US" sz="2100" spc="-1" strike="noStrike">
-                <a:solidFill>
-                  <a:srgbClr val="000000"/>
-                </a:solidFill>
-                <a:latin typeface="Calibri"/>
+              <a:rPr b="0" lang="en-US" sz="3200" spc="-1" strike="noStrike">
+                <a:latin typeface="Arial"/>
               </a:rPr>
-              <a:t>Для правки структуры щёлкните мышью</a:t>
-            </a:r>
-            <a:endParaRPr b="0" lang="en-US" sz="2100" spc="-1" strike="noStrike">
-              <a:solidFill>
-                <a:srgbClr val="000000"/>
-              </a:solidFill>
-              <a:latin typeface="Calibri"/>
+              <a:t>Click to edit the outline text format</a:t>
+            </a:r>
+            <a:endParaRPr b="0" lang="en-US" sz="3200" spc="-1" strike="noStrike">
+              <a:latin typeface="Arial"/>
             </a:endParaRPr>
           </a:p>
           <a:p>
             <a:pPr lvl="1" marL="864000" indent="-324000">
-              <a:lnSpc>
-                <a:spcPct val="90000"/>
-              </a:lnSpc>
               <a:spcBef>
                 <a:spcPts val="1134"/>
               </a:spcBef>
@@ -2885,26 +2563,17 @@
               <a:buChar char=""/>
             </a:pPr>
             <a:r>
-              <a:rPr b="0" lang="en-US" sz="1500" spc="-1" strike="noStrike">
-                <a:solidFill>
-                  <a:srgbClr val="000000"/>
-                </a:solidFill>
-                <a:latin typeface="Calibri"/>
+              <a:rPr b="0" lang="en-US" sz="2800" spc="-1" strike="noStrike">
+                <a:latin typeface="Arial"/>
               </a:rPr>
-              <a:t>Второй уровень структуры</a:t>
-            </a:r>
-            <a:endParaRPr b="0" lang="en-US" sz="1500" spc="-1" strike="noStrike">
-              <a:solidFill>
-                <a:srgbClr val="000000"/>
-              </a:solidFill>
-              <a:latin typeface="Calibri"/>
+              <a:t>Second Outline Level</a:t>
+            </a:r>
+            <a:endParaRPr b="0" lang="en-US" sz="2800" spc="-1" strike="noStrike">
+              <a:latin typeface="Arial"/>
             </a:endParaRPr>
           </a:p>
           <a:p>
             <a:pPr lvl="2" marL="1296000" indent="-288000">
-              <a:lnSpc>
-                <a:spcPct val="90000"/>
-              </a:lnSpc>
               <a:spcBef>
                 <a:spcPts val="850"/>
               </a:spcBef>
@@ -2916,26 +2585,17 @@
               <a:buChar char=""/>
             </a:pPr>
             <a:r>
-              <a:rPr b="0" lang="en-US" sz="1350" spc="-1" strike="noStrike">
-                <a:solidFill>
-                  <a:srgbClr val="000000"/>
-                </a:solidFill>
-                <a:latin typeface="Calibri"/>
+              <a:rPr b="0" lang="en-US" sz="2400" spc="-1" strike="noStrike">
+                <a:latin typeface="Arial"/>
               </a:rPr>
-              <a:t>Третий уровень структуры</a:t>
-            </a:r>
-            <a:endParaRPr b="0" lang="en-US" sz="1350" spc="-1" strike="noStrike">
-              <a:solidFill>
-                <a:srgbClr val="000000"/>
-              </a:solidFill>
-              <a:latin typeface="Calibri"/>
+              <a:t>Third Outline Level</a:t>
+            </a:r>
+            <a:endParaRPr b="0" lang="en-US" sz="2400" spc="-1" strike="noStrike">
+              <a:latin typeface="Arial"/>
             </a:endParaRPr>
           </a:p>
           <a:p>
             <a:pPr lvl="3" marL="1728000" indent="-216000">
-              <a:lnSpc>
-                <a:spcPct val="90000"/>
-              </a:lnSpc>
               <a:spcBef>
                 <a:spcPts val="567"/>
               </a:spcBef>
@@ -2947,26 +2607,17 @@
               <a:buChar char=""/>
             </a:pPr>
             <a:r>
-              <a:rPr b="0" lang="en-US" sz="1350" spc="-1" strike="noStrike">
-                <a:solidFill>
-                  <a:srgbClr val="000000"/>
-                </a:solidFill>
-                <a:latin typeface="Calibri"/>
+              <a:rPr b="0" lang="en-US" sz="2000" spc="-1" strike="noStrike">
+                <a:latin typeface="Arial"/>
               </a:rPr>
-              <a:t>Четвёртый уровень структуры</a:t>
-            </a:r>
-            <a:endParaRPr b="0" lang="en-US" sz="1350" spc="-1" strike="noStrike">
-              <a:solidFill>
-                <a:srgbClr val="000000"/>
-              </a:solidFill>
-              <a:latin typeface="Calibri"/>
+              <a:t>Fourth Outline Level</a:t>
+            </a:r>
+            <a:endParaRPr b="0" lang="en-US" sz="2000" spc="-1" strike="noStrike">
+              <a:latin typeface="Arial"/>
             </a:endParaRPr>
           </a:p>
           <a:p>
             <a:pPr lvl="4" marL="2160000" indent="-216000">
-              <a:lnSpc>
-                <a:spcPct val="90000"/>
-              </a:lnSpc>
               <a:spcBef>
                 <a:spcPts val="283"/>
               </a:spcBef>
@@ -2979,25 +2630,16 @@
             </a:pPr>
             <a:r>
               <a:rPr b="0" lang="en-US" sz="2000" spc="-1" strike="noStrike">
-                <a:solidFill>
-                  <a:srgbClr val="000000"/>
-                </a:solidFill>
-                <a:latin typeface="Calibri"/>
+                <a:latin typeface="Arial"/>
               </a:rPr>
-              <a:t>Пятый уровень структуры</a:t>
+              <a:t>Fifth Outline Level</a:t>
             </a:r>
             <a:endParaRPr b="0" lang="en-US" sz="2000" spc="-1" strike="noStrike">
-              <a:solidFill>
-                <a:srgbClr val="000000"/>
-              </a:solidFill>
-              <a:latin typeface="Calibri"/>
+              <a:latin typeface="Arial"/>
             </a:endParaRPr>
           </a:p>
           <a:p>
             <a:pPr lvl="5" marL="2592000" indent="-216000">
-              <a:lnSpc>
-                <a:spcPct val="90000"/>
-              </a:lnSpc>
               <a:spcBef>
                 <a:spcPts val="283"/>
               </a:spcBef>
@@ -3010,25 +2652,16 @@
             </a:pPr>
             <a:r>
               <a:rPr b="0" lang="en-US" sz="2000" spc="-1" strike="noStrike">
-                <a:solidFill>
-                  <a:srgbClr val="000000"/>
-                </a:solidFill>
-                <a:latin typeface="Calibri"/>
+                <a:latin typeface="Arial"/>
               </a:rPr>
-              <a:t>Шестой уровень структуры</a:t>
+              <a:t>Sixth Outline Level</a:t>
             </a:r>
             <a:endParaRPr b="0" lang="en-US" sz="2000" spc="-1" strike="noStrike">
-              <a:solidFill>
-                <a:srgbClr val="000000"/>
-              </a:solidFill>
-              <a:latin typeface="Calibri"/>
+              <a:latin typeface="Arial"/>
             </a:endParaRPr>
           </a:p>
           <a:p>
             <a:pPr lvl="6" marL="3024000" indent="-216000">
-              <a:lnSpc>
-                <a:spcPct val="90000"/>
-              </a:lnSpc>
               <a:spcBef>
                 <a:spcPts val="283"/>
               </a:spcBef>
@@ -3041,18 +2674,12 @@
             </a:pPr>
             <a:r>
               <a:rPr b="0" lang="en-US" sz="2000" spc="-1" strike="noStrike">
-                <a:solidFill>
-                  <a:srgbClr val="000000"/>
-                </a:solidFill>
-                <a:latin typeface="Calibri"/>
+                <a:latin typeface="Arial"/>
               </a:rPr>
-              <a:t>Седьмой уровень структуры</a:t>
+              <a:t>Seventh Outline Level</a:t>
             </a:r>
             <a:endParaRPr b="0" lang="en-US" sz="2000" spc="-1" strike="noStrike">
-              <a:solidFill>
-                <a:srgbClr val="000000"/>
-              </a:solidFill>
-              <a:latin typeface="Calibri"/>
+              <a:latin typeface="Arial"/>
             </a:endParaRPr>
           </a:p>
         </p:txBody>
@@ -3110,7 +2737,7 @@
         <p:spPr>
           <a:xfrm>
             <a:off x="186840" y="185400"/>
-            <a:ext cx="8770320" cy="4758120"/>
+            <a:ext cx="8769960" cy="4757760"/>
           </a:xfrm>
           <a:prstGeom prst="roundRect">
             <a:avLst>
@@ -3148,7 +2775,7 @@
         <p:spPr>
           <a:xfrm>
             <a:off x="460080" y="658080"/>
-            <a:ext cx="8469000" cy="3306960"/>
+            <a:ext cx="8468640" cy="3306600"/>
           </a:xfrm>
           <a:prstGeom prst="rect">
             <a:avLst/>
@@ -3185,58 +2812,7 @@
               </a:rPr>
               <a:t>TITLE</a:t>
             </a:r>
-            <a:endParaRPr b="0" lang="ru-RU" sz="5400" spc="-1" strike="noStrike">
-              <a:latin typeface="Arial"/>
-            </a:endParaRPr>
-          </a:p>
-        </p:txBody>
-      </p:sp>
-      <p:sp>
-        <p:nvSpPr>
-          <p:cNvPr id="43" name="Прямоугольник 5"/>
-          <p:cNvSpPr/>
-          <p:nvPr/>
-        </p:nvSpPr>
-        <p:spPr>
-          <a:xfrm>
-            <a:off x="460080" y="358920"/>
-            <a:ext cx="2999160" cy="269640"/>
-          </a:xfrm>
-          <a:prstGeom prst="rect">
-            <a:avLst/>
-          </a:prstGeom>
-          <a:noFill/>
-          <a:ln w="0">
-            <a:noFill/>
-          </a:ln>
-        </p:spPr>
-        <p:style>
-          <a:lnRef idx="0"/>
-          <a:fillRef idx="0"/>
-          <a:effectRef idx="0"/>
-          <a:fontRef idx="minor"/>
-        </p:style>
-        <p:txBody>
-          <a:bodyPr lIns="90000" rIns="90000" tIns="45000" bIns="45000" anchor="t">
-            <a:noAutofit/>
-          </a:bodyPr>
-          <a:p>
-            <a:pPr>
-              <a:lnSpc>
-                <a:spcPts val="1650"/>
-              </a:lnSpc>
-              <a:buNone/>
-            </a:pPr>
-            <a:r>
-              <a:rPr b="0" lang="ru-RU" sz="1400" spc="-1" strike="noStrike">
-                <a:solidFill>
-                  <a:srgbClr val="f2f2f2"/>
-                </a:solidFill>
-                <a:latin typeface="Arial"/>
-              </a:rPr>
-              <a:t>Тема:</a:t>
-            </a:r>
-            <a:endParaRPr b="0" lang="ru-RU" sz="1400" spc="-1" strike="noStrike">
+            <a:endParaRPr b="0" lang="en-US" sz="5400" spc="-1" strike="noStrike">
               <a:latin typeface="Arial"/>
             </a:endParaRPr>
           </a:p>
@@ -3281,14 +2857,14 @@
       </p:grpSpPr>
       <p:sp>
         <p:nvSpPr>
-          <p:cNvPr id="44" name="Прямоугольник со скругленными углами 3"/>
+          <p:cNvPr id="43" name="Прямоугольник со скругленными углами 3"/>
           <p:cNvSpPr/>
           <p:nvPr/>
         </p:nvSpPr>
         <p:spPr>
           <a:xfrm>
             <a:off x="3507480" y="0"/>
-            <a:ext cx="5636160" cy="5143320"/>
+            <a:ext cx="5635800" cy="5142960"/>
           </a:xfrm>
           <a:prstGeom prst="roundRect">
             <a:avLst>
@@ -3337,22 +2913,22 @@
               </a:rPr>
               <a:t>PIC</a:t>
             </a:r>
-            <a:endParaRPr b="0" lang="ru-RU" sz="1800" spc="-1" strike="noStrike">
-              <a:latin typeface="Arial"/>
-            </a:endParaRPr>
-          </a:p>
-        </p:txBody>
-      </p:sp>
-      <p:sp>
-        <p:nvSpPr>
-          <p:cNvPr id="45" name="Прямоугольник: скругленные углы 2"/>
+            <a:endParaRPr b="0" lang="en-US" sz="1800" spc="-1" strike="noStrike">
+              <a:latin typeface="Arial"/>
+            </a:endParaRPr>
+          </a:p>
+        </p:txBody>
+      </p:sp>
+      <p:sp>
+        <p:nvSpPr>
+          <p:cNvPr id="44" name="Прямоугольник: скругленные углы 2"/>
           <p:cNvSpPr/>
           <p:nvPr/>
         </p:nvSpPr>
         <p:spPr>
           <a:xfrm>
             <a:off x="3722040" y="257040"/>
-            <a:ext cx="5186160" cy="4650120"/>
+            <a:ext cx="5185800" cy="4649760"/>
           </a:xfrm>
           <a:prstGeom prst="roundRect">
             <a:avLst>
@@ -3386,14 +2962,14 @@
       </p:sp>
       <p:sp>
         <p:nvSpPr>
-          <p:cNvPr id="46" name="Овал 1"/>
+          <p:cNvPr id="45" name="Овал 1"/>
           <p:cNvSpPr/>
           <p:nvPr/>
         </p:nvSpPr>
         <p:spPr>
           <a:xfrm>
             <a:off x="4122000" y="631080"/>
-            <a:ext cx="899640" cy="899640"/>
+            <a:ext cx="899280" cy="899280"/>
           </a:xfrm>
           <a:prstGeom prst="ellipse">
             <a:avLst/>
@@ -3436,25 +3012,26 @@
                   <a:srgbClr val="ffffff"/>
                 </a:solidFill>
                 <a:latin typeface="Calibri"/>
+                <a:ea typeface="DejaVu Sans"/>
               </a:rPr>
               <a:t>01</a:t>
             </a:r>
-            <a:endParaRPr b="0" lang="ru-RU" sz="1800" spc="-1" strike="noStrike">
-              <a:latin typeface="Arial"/>
-            </a:endParaRPr>
-          </a:p>
-        </p:txBody>
-      </p:sp>
-      <p:sp>
-        <p:nvSpPr>
-          <p:cNvPr id="47" name="Овал 23"/>
+            <a:endParaRPr b="0" lang="en-US" sz="1800" spc="-1" strike="noStrike">
+              <a:latin typeface="Arial"/>
+            </a:endParaRPr>
+          </a:p>
+        </p:txBody>
+      </p:sp>
+      <p:sp>
+        <p:nvSpPr>
+          <p:cNvPr id="46" name="Овал 23"/>
           <p:cNvSpPr/>
           <p:nvPr/>
         </p:nvSpPr>
         <p:spPr>
           <a:xfrm>
             <a:off x="4122000" y="2127600"/>
-            <a:ext cx="899640" cy="887760"/>
+            <a:ext cx="899280" cy="887400"/>
           </a:xfrm>
           <a:prstGeom prst="ellipse">
             <a:avLst/>
@@ -3497,25 +3074,26 @@
                   <a:srgbClr val="ffffff"/>
                 </a:solidFill>
                 <a:latin typeface="Calibri"/>
+                <a:ea typeface="DejaVu Sans"/>
               </a:rPr>
               <a:t>02</a:t>
             </a:r>
-            <a:endParaRPr b="0" lang="ru-RU" sz="1800" spc="-1" strike="noStrike">
-              <a:latin typeface="Arial"/>
-            </a:endParaRPr>
-          </a:p>
-        </p:txBody>
-      </p:sp>
-      <p:sp>
-        <p:nvSpPr>
-          <p:cNvPr id="48" name="Овал 29"/>
+            <a:endParaRPr b="0" lang="en-US" sz="1800" spc="-1" strike="noStrike">
+              <a:latin typeface="Arial"/>
+            </a:endParaRPr>
+          </a:p>
+        </p:txBody>
+      </p:sp>
+      <p:sp>
+        <p:nvSpPr>
+          <p:cNvPr id="47" name="Овал 29"/>
           <p:cNvSpPr/>
           <p:nvPr/>
         </p:nvSpPr>
         <p:spPr>
           <a:xfrm>
             <a:off x="4122000" y="3612240"/>
-            <a:ext cx="899640" cy="899640"/>
+            <a:ext cx="899280" cy="899280"/>
           </a:xfrm>
           <a:prstGeom prst="ellipse">
             <a:avLst/>
@@ -3558,25 +3136,26 @@
                   <a:srgbClr val="ffffff"/>
                 </a:solidFill>
                 <a:latin typeface="Calibri"/>
+                <a:ea typeface="DejaVu Sans"/>
               </a:rPr>
               <a:t>03</a:t>
             </a:r>
-            <a:endParaRPr b="0" lang="ru-RU" sz="1800" spc="-1" strike="noStrike">
-              <a:latin typeface="Arial"/>
-            </a:endParaRPr>
-          </a:p>
-        </p:txBody>
-      </p:sp>
-      <p:sp>
-        <p:nvSpPr>
-          <p:cNvPr id="49" name="TextBox 10"/>
+            <a:endParaRPr b="0" lang="en-US" sz="1800" spc="-1" strike="noStrike">
+              <a:latin typeface="Arial"/>
+            </a:endParaRPr>
+          </a:p>
+        </p:txBody>
+      </p:sp>
+      <p:sp>
+        <p:nvSpPr>
+          <p:cNvPr id="48" name="TextBox 10"/>
           <p:cNvSpPr/>
           <p:nvPr/>
         </p:nvSpPr>
         <p:spPr>
           <a:xfrm>
             <a:off x="5110920" y="489600"/>
-            <a:ext cx="3579120" cy="550800"/>
+            <a:ext cx="3578760" cy="550440"/>
           </a:xfrm>
           <a:prstGeom prst="rect">
             <a:avLst/>
@@ -3623,22 +3202,22 @@
               </a:rPr>
               <a:t>1</a:t>
             </a:r>
-            <a:endParaRPr b="0" lang="ru-RU" sz="1400" spc="-1" strike="noStrike">
-              <a:latin typeface="Arial"/>
-            </a:endParaRPr>
-          </a:p>
-        </p:txBody>
-      </p:sp>
-      <p:sp>
-        <p:nvSpPr>
-          <p:cNvPr id="50" name="TextBox 10"/>
+            <a:endParaRPr b="0" lang="en-US" sz="1400" spc="-1" strike="noStrike">
+              <a:latin typeface="Arial"/>
+            </a:endParaRPr>
+          </a:p>
+        </p:txBody>
+      </p:sp>
+      <p:sp>
+        <p:nvSpPr>
+          <p:cNvPr id="49" name="TextBox 10"/>
           <p:cNvSpPr/>
           <p:nvPr/>
         </p:nvSpPr>
         <p:spPr>
           <a:xfrm>
             <a:off x="5110920" y="1025280"/>
-            <a:ext cx="3579120" cy="789840"/>
+            <a:ext cx="3578760" cy="789480"/>
           </a:xfrm>
           <a:prstGeom prst="rect">
             <a:avLst/>
@@ -3685,22 +3264,22 @@
               </a:rPr>
               <a:t>1</a:t>
             </a:r>
-            <a:endParaRPr b="0" lang="ru-RU" sz="1100" spc="-1" strike="noStrike">
-              <a:latin typeface="Arial"/>
-            </a:endParaRPr>
-          </a:p>
-        </p:txBody>
-      </p:sp>
-      <p:sp>
-        <p:nvSpPr>
-          <p:cNvPr id="51" name="TextBox 10"/>
+            <a:endParaRPr b="0" lang="en-US" sz="1100" spc="-1" strike="noStrike">
+              <a:latin typeface="Arial"/>
+            </a:endParaRPr>
+          </a:p>
+        </p:txBody>
+      </p:sp>
+      <p:sp>
+        <p:nvSpPr>
+          <p:cNvPr id="50" name="TextBox 10"/>
           <p:cNvSpPr/>
           <p:nvPr/>
         </p:nvSpPr>
         <p:spPr>
           <a:xfrm>
             <a:off x="5107320" y="1985400"/>
-            <a:ext cx="3579120" cy="550800"/>
+            <a:ext cx="3578760" cy="550440"/>
           </a:xfrm>
           <a:prstGeom prst="rect">
             <a:avLst/>
@@ -3737,22 +3316,22 @@
               </a:rPr>
               <a:t>SUBTITLE2</a:t>
             </a:r>
-            <a:endParaRPr b="0" lang="ru-RU" sz="1400" spc="-1" strike="noStrike">
-              <a:latin typeface="Arial"/>
-            </a:endParaRPr>
-          </a:p>
-        </p:txBody>
-      </p:sp>
-      <p:sp>
-        <p:nvSpPr>
-          <p:cNvPr id="52" name="TextBox 10"/>
+            <a:endParaRPr b="0" lang="en-US" sz="1400" spc="-1" strike="noStrike">
+              <a:latin typeface="Arial"/>
+            </a:endParaRPr>
+          </a:p>
+        </p:txBody>
+      </p:sp>
+      <p:sp>
+        <p:nvSpPr>
+          <p:cNvPr id="51" name="TextBox 10"/>
           <p:cNvSpPr/>
           <p:nvPr/>
         </p:nvSpPr>
         <p:spPr>
           <a:xfrm>
             <a:off x="5107320" y="2517840"/>
-            <a:ext cx="3579120" cy="843480"/>
+            <a:ext cx="3578760" cy="843120"/>
           </a:xfrm>
           <a:prstGeom prst="rect">
             <a:avLst/>
@@ -3799,22 +3378,22 @@
               </a:rPr>
               <a:t>2</a:t>
             </a:r>
-            <a:endParaRPr b="0" lang="ru-RU" sz="1100" spc="-1" strike="noStrike">
-              <a:latin typeface="Arial"/>
-            </a:endParaRPr>
-          </a:p>
-        </p:txBody>
-      </p:sp>
-      <p:sp>
-        <p:nvSpPr>
-          <p:cNvPr id="53" name="TextBox 10"/>
+            <a:endParaRPr b="0" lang="en-US" sz="1100" spc="-1" strike="noStrike">
+              <a:latin typeface="Arial"/>
+            </a:endParaRPr>
+          </a:p>
+        </p:txBody>
+      </p:sp>
+      <p:sp>
+        <p:nvSpPr>
+          <p:cNvPr id="52" name="TextBox 10"/>
           <p:cNvSpPr/>
           <p:nvPr/>
         </p:nvSpPr>
         <p:spPr>
           <a:xfrm>
             <a:off x="5107320" y="3470760"/>
-            <a:ext cx="3579120" cy="550800"/>
+            <a:ext cx="3578760" cy="550440"/>
           </a:xfrm>
           <a:prstGeom prst="rect">
             <a:avLst/>
@@ -3851,22 +3430,22 @@
               </a:rPr>
               <a:t>SUBTITLE3</a:t>
             </a:r>
-            <a:endParaRPr b="0" lang="ru-RU" sz="1400" spc="-1" strike="noStrike">
-              <a:latin typeface="Arial"/>
-            </a:endParaRPr>
-          </a:p>
-        </p:txBody>
-      </p:sp>
-      <p:sp>
-        <p:nvSpPr>
-          <p:cNvPr id="54" name="TextBox 10"/>
+            <a:endParaRPr b="0" lang="en-US" sz="1400" spc="-1" strike="noStrike">
+              <a:latin typeface="Arial"/>
+            </a:endParaRPr>
+          </a:p>
+        </p:txBody>
+      </p:sp>
+      <p:sp>
+        <p:nvSpPr>
+          <p:cNvPr id="53" name="TextBox 10"/>
           <p:cNvSpPr/>
           <p:nvPr/>
         </p:nvSpPr>
         <p:spPr>
           <a:xfrm>
             <a:off x="5107320" y="4003560"/>
-            <a:ext cx="3579120" cy="794880"/>
+            <a:ext cx="3578760" cy="794520"/>
           </a:xfrm>
           <a:prstGeom prst="rect">
             <a:avLst/>
@@ -3913,22 +3492,22 @@
               </a:rPr>
               <a:t>3</a:t>
             </a:r>
-            <a:endParaRPr b="0" lang="ru-RU" sz="1100" spc="-1" strike="noStrike">
-              <a:latin typeface="Arial"/>
-            </a:endParaRPr>
-          </a:p>
-        </p:txBody>
-      </p:sp>
-      <p:sp>
-        <p:nvSpPr>
-          <p:cNvPr id="55" name="TextBox 13"/>
+            <a:endParaRPr b="0" lang="en-US" sz="1100" spc="-1" strike="noStrike">
+              <a:latin typeface="Arial"/>
+            </a:endParaRPr>
+          </a:p>
+        </p:txBody>
+      </p:sp>
+      <p:sp>
+        <p:nvSpPr>
+          <p:cNvPr id="54" name="TextBox 13"/>
           <p:cNvSpPr/>
           <p:nvPr/>
         </p:nvSpPr>
         <p:spPr>
           <a:xfrm>
             <a:off x="165960" y="200880"/>
-            <a:ext cx="3148200" cy="1842120"/>
+            <a:ext cx="3147840" cy="1841760"/>
           </a:xfrm>
           <a:prstGeom prst="rect">
             <a:avLst/>
@@ -3961,10 +3540,11 @@
                   <a:srgbClr val="ffffff"/>
                 </a:solidFill>
                 <a:latin typeface="Arial"/>
+                <a:ea typeface="DejaVu Sans"/>
               </a:rPr>
               <a:t>TITLE</a:t>
             </a:r>
-            <a:endParaRPr b="0" lang="ru-RU" sz="2200" spc="-1" strike="noStrike">
+            <a:endParaRPr b="0" lang="en-US" sz="2200" spc="-1" strike="noStrike">
               <a:latin typeface="Arial"/>
             </a:endParaRPr>
           </a:p>
@@ -4009,14 +3589,14 @@
       </p:grpSpPr>
       <p:sp>
         <p:nvSpPr>
-          <p:cNvPr id="56" name="Прямоугольник со скругленными углами 3"/>
+          <p:cNvPr id="55" name="Прямоугольник со скругленными углами 3"/>
           <p:cNvSpPr/>
           <p:nvPr/>
         </p:nvSpPr>
         <p:spPr>
           <a:xfrm>
             <a:off x="186840" y="185400"/>
-            <a:ext cx="8770320" cy="4758120"/>
+            <a:ext cx="8769960" cy="4757760"/>
           </a:xfrm>
           <a:prstGeom prst="roundRect">
             <a:avLst>
@@ -4047,14 +3627,14 @@
       </p:sp>
       <p:sp>
         <p:nvSpPr>
-          <p:cNvPr id="57" name="Прямоугольник 10"/>
+          <p:cNvPr id="56" name="Прямоугольник 10"/>
           <p:cNvSpPr/>
           <p:nvPr/>
         </p:nvSpPr>
         <p:spPr>
           <a:xfrm>
             <a:off x="460080" y="658080"/>
-            <a:ext cx="8469000" cy="3306960"/>
+            <a:ext cx="8468640" cy="3306600"/>
           </a:xfrm>
           <a:prstGeom prst="rect">
             <a:avLst/>
@@ -4091,7 +3671,7 @@
               </a:rPr>
               <a:t>TITLE</a:t>
             </a:r>
-            <a:endParaRPr b="0" lang="ru-RU" sz="5400" spc="-1" strike="noStrike">
+            <a:endParaRPr b="0" lang="en-US" sz="5400" spc="-1" strike="noStrike">
               <a:latin typeface="Arial"/>
             </a:endParaRPr>
           </a:p>
